--- a/design/deck/RoadAssist-Bharat-Review.pptx
+++ b/design/deck/RoadAssist-Bharat-Review.pptx
@@ -211,7 +211,7 @@
                 <c:formatCode>General</c:formatCode>
                 <c:ptCount val="6"/>
                 <c:pt idx="0">
-                  <c:v>122</c:v>
+                  <c:v>125</c:v>
                 </c:pt>
                 <c:pt idx="1">
                   <c:v>189</c:v>
@@ -1817,7 +1817,7 @@
           <a:p>
             <a:r>
               <a:rPr lang="en-US" dirty="0"/>
-              <a:t>650 assertions across unit, end-to-end, concurrency, security, gateway security and browser suites, zero failures. The security suite attempts 74 attacks including cross-tenant reads, role escalation, SQL injection and forged tokens. The 22 payment-sandbox checks need an account we do not have, so they are reported as not run.</a:t>
+              <a:t>653 assertions across unit, end-to-end, concurrency, security, gateway security and browser suites, zero failures. The security suite attempts 74 attacks including cross-tenant reads, role escalation, SQL injection and forged tokens. The 22 payment-sandbox checks need an account we do not have, so they are reported as not run.</a:t>
             </a:r>
             <a:endParaRPr lang="en-US" dirty="0"/>
           </a:p>
@@ -12443,7 +12443,7 @@
                 <a:ea typeface="Bahnschrift" pitchFamily="34" charset="-122"/>
                 <a:cs typeface="Bahnschrift" pitchFamily="34" charset="-120"/>
               </a:rPr>
-              <a:t>650</a:t>
+              <a:t>653</a:t>
             </a:r>
             <a:endParaRPr lang="en-US" sz="6000" dirty="0"/>
           </a:p>

--- a/design/deck/RoadAssist-Bharat-Review.pptx
+++ b/design/deck/RoadAssist-Bharat-Review.pptx
@@ -211,7 +211,7 @@
                 <c:formatCode>General</c:formatCode>
                 <c:ptCount val="6"/>
                 <c:pt idx="0">
-                  <c:v>125</c:v>
+                  <c:v>144</c:v>
                 </c:pt>
                 <c:pt idx="1">
                   <c:v>189</c:v>
@@ -1817,7 +1817,7 @@
           <a:p>
             <a:r>
               <a:rPr lang="en-US" dirty="0"/>
-              <a:t>653 assertions across unit, end-to-end, concurrency, security, gateway security and browser suites, zero failures. The security suite attempts 74 attacks including cross-tenant reads, role escalation, SQL injection and forged tokens. The 22 payment-sandbox checks need an account we do not have, so they are reported as not run.</a:t>
+              <a:t>672 assertions across unit, end-to-end, concurrency, security, gateway security and browser suites, zero failures. The security suite attempts 74 attacks including cross-tenant reads, role escalation, SQL injection and forged tokens. The 22 payment-sandbox checks need an account we do not have, so they are reported as not run.</a:t>
             </a:r>
             <a:endParaRPr lang="en-US" dirty="0"/>
           </a:p>
@@ -12443,7 +12443,7 @@
                 <a:ea typeface="Bahnschrift" pitchFamily="34" charset="-122"/>
                 <a:cs typeface="Bahnschrift" pitchFamily="34" charset="-120"/>
               </a:rPr>
-              <a:t>653</a:t>
+              <a:t>672</a:t>
             </a:r>
             <a:endParaRPr lang="en-US" sz="6000" dirty="0"/>
           </a:p>

--- a/design/deck/RoadAssist-Bharat-Review.pptx
+++ b/design/deck/RoadAssist-Bharat-Review.pptx
@@ -2892,7 +2892,7 @@
                 <a:ea typeface="Consolas" pitchFamily="34" charset="-122"/>
                 <a:cs typeface="Consolas" pitchFamily="34" charset="-120"/>
               </a:rPr>
-              <a:t>24MIC145</a:t>
+              <a:t>24MIC7145</a:t>
             </a:r>
             <a:endParaRPr lang="en-US" sz="1050" dirty="0"/>
           </a:p>
@@ -3395,7 +3395,7 @@
                 <a:ea typeface="Segoe UI" pitchFamily="34" charset="-122"/>
                 <a:cs typeface="Segoe UI" pitchFamily="34" charset="-120"/>
               </a:rPr>
-              <a:t>no visitor address leaves India; server egress is declared</a:t>
+              <a:t>no page loads a third party; server egress is declared</a:t>
             </a:r>
             <a:endParaRPr lang="en-US" sz="1300" dirty="0"/>
           </a:p>
@@ -5436,7 +5436,7 @@
                 <a:ea typeface="Consolas" pitchFamily="34" charset="-122"/>
                 <a:cs typeface="Consolas" pitchFamily="34" charset="-120"/>
               </a:rPr>
-              <a:t>24MIC145</a:t>
+              <a:t>24MIC7145</a:t>
             </a:r>
             <a:endParaRPr lang="en-US" sz="1100" dirty="0"/>
           </a:p>
@@ -11424,7 +11424,7 @@
                 <a:ea typeface="Segoe UI" pitchFamily="34" charset="-122"/>
                 <a:cs typeface="Segoe UI" pitchFamily="34" charset="-120"/>
               </a:rPr>
-              <a:t>65 routes under /v1</a:t>
+              <a:t>64 routes under /v1</a:t>
             </a:r>
             <a:endParaRPr lang="en-US" sz="1250" dirty="0"/>
           </a:p>
@@ -12443,7 +12443,7 @@
                 <a:ea typeface="Bahnschrift" pitchFamily="34" charset="-122"/>
                 <a:cs typeface="Bahnschrift" pitchFamily="34" charset="-120"/>
               </a:rPr>
-              <a:t>672</a:t>
+              <a:t>757</a:t>
             </a:r>
             <a:endParaRPr lang="en-US" sz="6000" dirty="0"/>
           </a:p>
@@ -12680,7 +12680,7 @@
                 <a:ea typeface="Segoe UI" pitchFamily="34" charset="-122"/>
                 <a:cs typeface="Segoe UI" pitchFamily="34" charset="-120"/>
               </a:rPr>
-              <a:t>22 Razorpay sandbox checks need a payment account — never run, not counted.</a:t>
+              <a:t>22 Razorpay checks run against a local stub, outside the 757 — never counted as passing.</a:t>
             </a:r>
             <a:endParaRPr lang="en-US" sz="1200" dirty="0"/>
           </a:p>
